--- a/assets/figures-editable/appendix-studies/a-e11.pptx
+++ b/assets/figures-editable/appendix-studies/a-e11.pptx
@@ -7,7 +7,7 @@
   <p:sldIdLst>
     <p:sldId id="256" r:id="rId7"/>
   </p:sldIdLst>
-  <p:sldSz cx="8961120" cy="5870448" type="screen4x3"/>
+  <p:sldSz cx="12191695" cy="6858000" type="screen4x3"/>
   <p:notesSz cx="6858000" cy="9144000"/>
   <p:defaultTextStyle>
     <a:defPPr>
@@ -3098,14 +3098,14 @@
       <p:grpSpPr/>
       <p:sp>
         <p:nvSpPr>
-          <p:cNvPr id="2" name="text 0" descr="sci-ppt:obj-000"/>
+          <p:cNvPr id="2" name="A-E11 text 0" descr="sci-ppt:o000"/>
           <p:cNvSpPr txBox="1"/>
           <p:nvPr/>
         </p:nvSpPr>
         <p:spPr>
           <a:xfrm>
-            <a:off x="256032" y="137160"/>
-            <a:ext cx="7315200" cy="310896"/>
+            <a:off x="274320" y="118872"/>
+            <a:ext cx="11612880" cy="340105"/>
           </a:xfrm>
           <a:prstGeom prst="rect">
             <a:avLst/>
@@ -3114,7 +3114,7 @@
           <a:effectLst/>
         </p:spPr>
         <p:txBody>
-          <a:bodyPr wrap="none" lIns="0" rIns="0" tIns="0" bIns="0" anchor="ctr">
+          <a:bodyPr wrap="none" lIns="18288" rIns="18288" tIns="18288" bIns="18288" anchor="t">
             <a:spAutoFit/>
           </a:bodyPr>
           <a:lstStyle/>
@@ -3125,113 +3125,1227 @@
               </a:spcAft>
             </a:pPr>
             <a:r>
-              <a:rPr sz="1439" b="0" i="0">
+              <a:rPr sz="1900" b="1" i="0">
                 <a:solidFill>
                   <a:srgbClr val="8EDBD4"/>
                 </a:solidFill>
                 <a:latin typeface="Arial"/>
               </a:rPr>
-              <a:t>A-E11 · Physical variable map</a:t>
-            </a:r>
-          </a:p>
-        </p:txBody>
-      </p:sp>
-      <p:sp>
-        <p:nvSpPr>
-          <p:cNvPr id="3" name="ellipse 1" descr="sci-ppt:obj-001"/>
-          <p:cNvSpPr/>
+              <a:t>A-E11 · Derived intact-medium radial control</a:t>
+            </a:r>
+          </a:p>
+        </p:txBody>
+      </p:sp>
+      <p:sp>
+        <p:nvSpPr>
+          <p:cNvPr id="3" name="A-E11 text 1" descr="sci-ppt:o001"/>
+          <p:cNvSpPr txBox="1"/>
           <p:nvPr/>
         </p:nvSpPr>
         <p:spPr>
           <a:xfrm>
-            <a:off x="1060704" y="914400"/>
-            <a:ext cx="1463040" cy="1463040"/>
-          </a:xfrm>
-          <a:prstGeom prst="ellipse">
+            <a:off x="457200" y="914400"/>
+            <a:ext cx="5943600" cy="254889"/>
+          </a:xfrm>
+          <a:prstGeom prst="rect">
             <a:avLst/>
           </a:prstGeom>
           <a:noFill/>
-          <a:ln w="17780">
+          <a:effectLst/>
+        </p:spPr>
+        <p:txBody>
+          <a:bodyPr wrap="none" lIns="18288" rIns="18288" tIns="18288" bIns="18288" anchor="t">
+            <a:spAutoFit/>
+          </a:bodyPr>
+          <a:lstStyle/>
+          <a:p>
+            <a:pPr algn="l">
+              <a:spcAft>
+                <a:spcPts val="0"/>
+              </a:spcAft>
+            </a:pPr>
+            <a:r>
+              <a:rPr sz="1350" b="1" i="0">
+                <a:solidFill>
+                  <a:srgbClr val="8EDBD4"/>
+                </a:solidFill>
+                <a:latin typeface="Arial"/>
+              </a:rPr>
+              <a:t>Pressure ledger at one instant (kPa)</a:t>
+            </a:r>
+          </a:p>
+        </p:txBody>
+      </p:sp>
+      <p:cxnSp>
+        <p:nvCxnSpPr>
+          <p:cNvPr id="4" name="A-E11 line 2" descr="sci-ppt:o002"/>
+          <p:cNvCxnSpPr/>
+          <p:nvPr/>
+        </p:nvCxnSpPr>
+        <p:spPr>
+          <a:xfrm>
+            <a:off x="548640" y="4754880"/>
+            <a:ext cx="6400800" cy="0"/>
+          </a:xfrm>
+          <a:prstGeom prst="line">
+            <a:avLst/>
+          </a:prstGeom>
+          <a:ln w="19050">
             <a:solidFill>
               <a:srgbClr val="B4C7D2"/>
             </a:solidFill>
           </a:ln>
           <a:effectLst/>
         </p:spPr>
-        <p:txBody>
-          <a:bodyPr rtlCol="0" anchor="ctr"/>
-          <a:lstStyle/>
-          <a:p>
-            <a:pPr algn="ctr"/>
-          </a:p>
-        </p:txBody>
-      </p:sp>
-      <p:sp>
-        <p:nvSpPr>
-          <p:cNvPr id="4" name="ellipse 2" descr="sci-ppt:obj-002"/>
-          <p:cNvSpPr/>
+      </p:cxnSp>
+      <p:cxnSp>
+        <p:nvCxnSpPr>
+          <p:cNvPr id="5" name="A-E11 line 3" descr="sci-ppt:o003"/>
+          <p:cNvCxnSpPr/>
           <p:nvPr/>
-        </p:nvSpPr>
-        <p:spPr>
-          <a:xfrm>
-            <a:off x="1463040" y="1316736"/>
-            <a:ext cx="658368" cy="658368"/>
-          </a:xfrm>
-          <a:prstGeom prst="ellipse">
-            <a:avLst/>
-          </a:prstGeom>
-          <a:solidFill>
-            <a:srgbClr val="213E4B"/>
-          </a:solidFill>
-          <a:ln w="17780">
+        </p:nvCxnSpPr>
+        <p:spPr>
+          <a:xfrm>
+            <a:off x="548640" y="1463040"/>
+            <a:ext cx="0" cy="3291840"/>
+          </a:xfrm>
+          <a:prstGeom prst="line">
+            <a:avLst/>
+          </a:prstGeom>
+          <a:ln w="19050">
             <a:solidFill>
               <a:srgbClr val="B4C7D2"/>
             </a:solidFill>
           </a:ln>
           <a:effectLst/>
         </p:spPr>
-        <p:txBody>
-          <a:bodyPr rtlCol="0" anchor="ctr"/>
-          <a:lstStyle/>
-          <a:p>
-            <a:pPr algn="ctr"/>
-          </a:p>
-        </p:txBody>
-      </p:sp>
+      </p:cxnSp>
       <p:cxnSp>
         <p:nvCxnSpPr>
-          <p:cNvPr id="5" name="arrow 3" descr="sci-ppt:obj-003"/>
+          <p:cNvPr id="6" name="A-E11 line 4" descr="sci-ppt:o004"/>
           <p:cNvCxnSpPr/>
           <p:nvPr/>
         </p:nvCxnSpPr>
         <p:spPr>
           <a:xfrm>
-            <a:off x="1792224" y="1645920"/>
-            <a:ext cx="329184" cy="0"/>
+            <a:off x="484632" y="4754880"/>
+            <a:ext cx="64008" cy="0"/>
           </a:xfrm>
           <a:prstGeom prst="line">
             <a:avLst/>
           </a:prstGeom>
-          <a:ln w="21590">
+          <a:ln w="12700">
+            <a:solidFill>
+              <a:srgbClr val="B4C7D2"/>
+            </a:solidFill>
+          </a:ln>
+          <a:effectLst/>
+        </p:spPr>
+      </p:cxnSp>
+      <p:cxnSp>
+        <p:nvCxnSpPr>
+          <p:cNvPr id="7" name="A-E11 line 5" descr="sci-ppt:o005"/>
+          <p:cNvCxnSpPr/>
+          <p:nvPr/>
+        </p:nvCxnSpPr>
+        <p:spPr>
+          <a:xfrm>
+            <a:off x="548640" y="4754880"/>
+            <a:ext cx="6400800" cy="0"/>
+          </a:xfrm>
+          <a:prstGeom prst="line">
+            <a:avLst/>
+          </a:prstGeom>
+          <a:ln w="7620">
+            <a:solidFill>
+              <a:srgbClr val="2E4756"/>
+            </a:solidFill>
+          </a:ln>
+          <a:effectLst/>
+        </p:spPr>
+      </p:cxnSp>
+      <p:sp>
+        <p:nvSpPr>
+          <p:cNvPr id="8" name="A-E11 text 6" descr="sci-ppt:o006"/>
+          <p:cNvSpPr txBox="1"/>
+          <p:nvPr/>
+        </p:nvSpPr>
+        <p:spPr>
+          <a:xfrm>
+            <a:off x="-320040" y="4672584"/>
+            <a:ext cx="777240" cy="208407"/>
+          </a:xfrm>
+          <a:prstGeom prst="rect">
+            <a:avLst/>
+          </a:prstGeom>
+          <a:noFill/>
+          <a:effectLst/>
+        </p:spPr>
+        <p:txBody>
+          <a:bodyPr wrap="none" lIns="18288" rIns="18288" tIns="18288" bIns="18288" anchor="t">
+            <a:spAutoFit/>
+          </a:bodyPr>
+          <a:lstStyle/>
+          <a:p>
+            <a:pPr algn="r">
+              <a:spcAft>
+                <a:spcPts val="0"/>
+              </a:spcAft>
+            </a:pPr>
+            <a:r>
+              <a:rPr sz="1050" b="0" i="0">
+                <a:solidFill>
+                  <a:srgbClr val="B4C7D2"/>
+                </a:solidFill>
+                <a:latin typeface="Arial"/>
+              </a:rPr>
+              <a:t>0</a:t>
+            </a:r>
+          </a:p>
+        </p:txBody>
+      </p:sp>
+      <p:cxnSp>
+        <p:nvCxnSpPr>
+          <p:cNvPr id="9" name="A-E11 line 7" descr="sci-ppt:o007"/>
+          <p:cNvCxnSpPr/>
+          <p:nvPr/>
+        </p:nvCxnSpPr>
+        <p:spPr>
+          <a:xfrm>
+            <a:off x="484632" y="4096512"/>
+            <a:ext cx="64008" cy="0"/>
+          </a:xfrm>
+          <a:prstGeom prst="line">
+            <a:avLst/>
+          </a:prstGeom>
+          <a:ln w="12700">
+            <a:solidFill>
+              <a:srgbClr val="B4C7D2"/>
+            </a:solidFill>
+          </a:ln>
+          <a:effectLst/>
+        </p:spPr>
+      </p:cxnSp>
+      <p:cxnSp>
+        <p:nvCxnSpPr>
+          <p:cNvPr id="10" name="A-E11 line 8" descr="sci-ppt:o008"/>
+          <p:cNvCxnSpPr/>
+          <p:nvPr/>
+        </p:nvCxnSpPr>
+        <p:spPr>
+          <a:xfrm>
+            <a:off x="548640" y="4096512"/>
+            <a:ext cx="6400800" cy="0"/>
+          </a:xfrm>
+          <a:prstGeom prst="line">
+            <a:avLst/>
+          </a:prstGeom>
+          <a:ln w="7620">
+            <a:solidFill>
+              <a:srgbClr val="2E4756"/>
+            </a:solidFill>
+          </a:ln>
+          <a:effectLst/>
+        </p:spPr>
+      </p:cxnSp>
+      <p:sp>
+        <p:nvSpPr>
+          <p:cNvPr id="11" name="A-E11 text 9" descr="sci-ppt:o009"/>
+          <p:cNvSpPr txBox="1"/>
+          <p:nvPr/>
+        </p:nvSpPr>
+        <p:spPr>
+          <a:xfrm>
+            <a:off x="-320040" y="4014216"/>
+            <a:ext cx="777240" cy="208407"/>
+          </a:xfrm>
+          <a:prstGeom prst="rect">
+            <a:avLst/>
+          </a:prstGeom>
+          <a:noFill/>
+          <a:effectLst/>
+        </p:spPr>
+        <p:txBody>
+          <a:bodyPr wrap="none" lIns="18288" rIns="18288" tIns="18288" bIns="18288" anchor="t">
+            <a:spAutoFit/>
+          </a:bodyPr>
+          <a:lstStyle/>
+          <a:p>
+            <a:pPr algn="r">
+              <a:spcAft>
+                <a:spcPts val="0"/>
+              </a:spcAft>
+            </a:pPr>
+            <a:r>
+              <a:rPr sz="1050" b="0" i="0">
+                <a:solidFill>
+                  <a:srgbClr val="B4C7D2"/>
+                </a:solidFill>
+                <a:latin typeface="Arial"/>
+              </a:rPr>
+              <a:t>25</a:t>
+            </a:r>
+          </a:p>
+        </p:txBody>
+      </p:sp>
+      <p:cxnSp>
+        <p:nvCxnSpPr>
+          <p:cNvPr id="12" name="A-E11 line 10" descr="sci-ppt:o010"/>
+          <p:cNvCxnSpPr/>
+          <p:nvPr/>
+        </p:nvCxnSpPr>
+        <p:spPr>
+          <a:xfrm>
+            <a:off x="484632" y="3438144"/>
+            <a:ext cx="64008" cy="0"/>
+          </a:xfrm>
+          <a:prstGeom prst="line">
+            <a:avLst/>
+          </a:prstGeom>
+          <a:ln w="12700">
+            <a:solidFill>
+              <a:srgbClr val="B4C7D2"/>
+            </a:solidFill>
+          </a:ln>
+          <a:effectLst/>
+        </p:spPr>
+      </p:cxnSp>
+      <p:cxnSp>
+        <p:nvCxnSpPr>
+          <p:cNvPr id="13" name="A-E11 line 11" descr="sci-ppt:o011"/>
+          <p:cNvCxnSpPr/>
+          <p:nvPr/>
+        </p:nvCxnSpPr>
+        <p:spPr>
+          <a:xfrm>
+            <a:off x="548640" y="3438144"/>
+            <a:ext cx="6400800" cy="0"/>
+          </a:xfrm>
+          <a:prstGeom prst="line">
+            <a:avLst/>
+          </a:prstGeom>
+          <a:ln w="7620">
+            <a:solidFill>
+              <a:srgbClr val="2E4756"/>
+            </a:solidFill>
+          </a:ln>
+          <a:effectLst/>
+        </p:spPr>
+      </p:cxnSp>
+      <p:sp>
+        <p:nvSpPr>
+          <p:cNvPr id="14" name="A-E11 text 12" descr="sci-ppt:o012"/>
+          <p:cNvSpPr txBox="1"/>
+          <p:nvPr/>
+        </p:nvSpPr>
+        <p:spPr>
+          <a:xfrm>
+            <a:off x="-320040" y="3355848"/>
+            <a:ext cx="777240" cy="208407"/>
+          </a:xfrm>
+          <a:prstGeom prst="rect">
+            <a:avLst/>
+          </a:prstGeom>
+          <a:noFill/>
+          <a:effectLst/>
+        </p:spPr>
+        <p:txBody>
+          <a:bodyPr wrap="none" lIns="18288" rIns="18288" tIns="18288" bIns="18288" anchor="t">
+            <a:spAutoFit/>
+          </a:bodyPr>
+          <a:lstStyle/>
+          <a:p>
+            <a:pPr algn="r">
+              <a:spcAft>
+                <a:spcPts val="0"/>
+              </a:spcAft>
+            </a:pPr>
+            <a:r>
+              <a:rPr sz="1050" b="0" i="0">
+                <a:solidFill>
+                  <a:srgbClr val="B4C7D2"/>
+                </a:solidFill>
+                <a:latin typeface="Arial"/>
+              </a:rPr>
+              <a:t>50</a:t>
+            </a:r>
+          </a:p>
+        </p:txBody>
+      </p:sp>
+      <p:cxnSp>
+        <p:nvCxnSpPr>
+          <p:cNvPr id="15" name="A-E11 line 13" descr="sci-ppt:o013"/>
+          <p:cNvCxnSpPr/>
+          <p:nvPr/>
+        </p:nvCxnSpPr>
+        <p:spPr>
+          <a:xfrm>
+            <a:off x="484632" y="2779776"/>
+            <a:ext cx="64008" cy="0"/>
+          </a:xfrm>
+          <a:prstGeom prst="line">
+            <a:avLst/>
+          </a:prstGeom>
+          <a:ln w="12700">
+            <a:solidFill>
+              <a:srgbClr val="B4C7D2"/>
+            </a:solidFill>
+          </a:ln>
+          <a:effectLst/>
+        </p:spPr>
+      </p:cxnSp>
+      <p:cxnSp>
+        <p:nvCxnSpPr>
+          <p:cNvPr id="16" name="A-E11 line 14" descr="sci-ppt:o014"/>
+          <p:cNvCxnSpPr/>
+          <p:nvPr/>
+        </p:nvCxnSpPr>
+        <p:spPr>
+          <a:xfrm>
+            <a:off x="548640" y="2779776"/>
+            <a:ext cx="6400800" cy="0"/>
+          </a:xfrm>
+          <a:prstGeom prst="line">
+            <a:avLst/>
+          </a:prstGeom>
+          <a:ln w="7620">
+            <a:solidFill>
+              <a:srgbClr val="2E4756"/>
+            </a:solidFill>
+          </a:ln>
+          <a:effectLst/>
+        </p:spPr>
+      </p:cxnSp>
+      <p:sp>
+        <p:nvSpPr>
+          <p:cNvPr id="17" name="A-E11 text 15" descr="sci-ppt:o015"/>
+          <p:cNvSpPr txBox="1"/>
+          <p:nvPr/>
+        </p:nvSpPr>
+        <p:spPr>
+          <a:xfrm>
+            <a:off x="-320040" y="2697480"/>
+            <a:ext cx="777240" cy="208407"/>
+          </a:xfrm>
+          <a:prstGeom prst="rect">
+            <a:avLst/>
+          </a:prstGeom>
+          <a:noFill/>
+          <a:effectLst/>
+        </p:spPr>
+        <p:txBody>
+          <a:bodyPr wrap="none" lIns="18288" rIns="18288" tIns="18288" bIns="18288" anchor="t">
+            <a:spAutoFit/>
+          </a:bodyPr>
+          <a:lstStyle/>
+          <a:p>
+            <a:pPr algn="r">
+              <a:spcAft>
+                <a:spcPts val="0"/>
+              </a:spcAft>
+            </a:pPr>
+            <a:r>
+              <a:rPr sz="1050" b="0" i="0">
+                <a:solidFill>
+                  <a:srgbClr val="B4C7D2"/>
+                </a:solidFill>
+                <a:latin typeface="Arial"/>
+              </a:rPr>
+              <a:t>75</a:t>
+            </a:r>
+          </a:p>
+        </p:txBody>
+      </p:sp>
+      <p:cxnSp>
+        <p:nvCxnSpPr>
+          <p:cNvPr id="18" name="A-E11 line 16" descr="sci-ppt:o016"/>
+          <p:cNvCxnSpPr/>
+          <p:nvPr/>
+        </p:nvCxnSpPr>
+        <p:spPr>
+          <a:xfrm>
+            <a:off x="484632" y="2121408"/>
+            <a:ext cx="64008" cy="0"/>
+          </a:xfrm>
+          <a:prstGeom prst="line">
+            <a:avLst/>
+          </a:prstGeom>
+          <a:ln w="12700">
+            <a:solidFill>
+              <a:srgbClr val="B4C7D2"/>
+            </a:solidFill>
+          </a:ln>
+          <a:effectLst/>
+        </p:spPr>
+      </p:cxnSp>
+      <p:cxnSp>
+        <p:nvCxnSpPr>
+          <p:cNvPr id="19" name="A-E11 line 17" descr="sci-ppt:o017"/>
+          <p:cNvCxnSpPr/>
+          <p:nvPr/>
+        </p:nvCxnSpPr>
+        <p:spPr>
+          <a:xfrm>
+            <a:off x="548640" y="2121408"/>
+            <a:ext cx="6400800" cy="0"/>
+          </a:xfrm>
+          <a:prstGeom prst="line">
+            <a:avLst/>
+          </a:prstGeom>
+          <a:ln w="7620">
+            <a:solidFill>
+              <a:srgbClr val="2E4756"/>
+            </a:solidFill>
+          </a:ln>
+          <a:effectLst/>
+        </p:spPr>
+      </p:cxnSp>
+      <p:sp>
+        <p:nvSpPr>
+          <p:cNvPr id="20" name="A-E11 text 18" descr="sci-ppt:o018"/>
+          <p:cNvSpPr txBox="1"/>
+          <p:nvPr/>
+        </p:nvSpPr>
+        <p:spPr>
+          <a:xfrm>
+            <a:off x="-320040" y="2039112"/>
+            <a:ext cx="777240" cy="208407"/>
+          </a:xfrm>
+          <a:prstGeom prst="rect">
+            <a:avLst/>
+          </a:prstGeom>
+          <a:noFill/>
+          <a:effectLst/>
+        </p:spPr>
+        <p:txBody>
+          <a:bodyPr wrap="none" lIns="18288" rIns="18288" tIns="18288" bIns="18288" anchor="t">
+            <a:spAutoFit/>
+          </a:bodyPr>
+          <a:lstStyle/>
+          <a:p>
+            <a:pPr algn="r">
+              <a:spcAft>
+                <a:spcPts val="0"/>
+              </a:spcAft>
+            </a:pPr>
+            <a:r>
+              <a:rPr sz="1050" b="0" i="0">
+                <a:solidFill>
+                  <a:srgbClr val="B4C7D2"/>
+                </a:solidFill>
+                <a:latin typeface="Arial"/>
+              </a:rPr>
+              <a:t>100</a:t>
+            </a:r>
+          </a:p>
+        </p:txBody>
+      </p:sp>
+      <p:cxnSp>
+        <p:nvCxnSpPr>
+          <p:cNvPr id="21" name="A-E11 line 19" descr="sci-ppt:o019"/>
+          <p:cNvCxnSpPr/>
+          <p:nvPr/>
+        </p:nvCxnSpPr>
+        <p:spPr>
+          <a:xfrm>
+            <a:off x="484632" y="1463040"/>
+            <a:ext cx="64008" cy="0"/>
+          </a:xfrm>
+          <a:prstGeom prst="line">
+            <a:avLst/>
+          </a:prstGeom>
+          <a:ln w="12700">
+            <a:solidFill>
+              <a:srgbClr val="B4C7D2"/>
+            </a:solidFill>
+          </a:ln>
+          <a:effectLst/>
+        </p:spPr>
+      </p:cxnSp>
+      <p:cxnSp>
+        <p:nvCxnSpPr>
+          <p:cNvPr id="22" name="A-E11 line 20" descr="sci-ppt:o020"/>
+          <p:cNvCxnSpPr/>
+          <p:nvPr/>
+        </p:nvCxnSpPr>
+        <p:spPr>
+          <a:xfrm>
+            <a:off x="548640" y="1463040"/>
+            <a:ext cx="6400800" cy="0"/>
+          </a:xfrm>
+          <a:prstGeom prst="line">
+            <a:avLst/>
+          </a:prstGeom>
+          <a:ln w="7620">
+            <a:solidFill>
+              <a:srgbClr val="2E4756"/>
+            </a:solidFill>
+          </a:ln>
+          <a:effectLst/>
+        </p:spPr>
+      </p:cxnSp>
+      <p:sp>
+        <p:nvSpPr>
+          <p:cNvPr id="23" name="A-E11 text 21" descr="sci-ppt:o021"/>
+          <p:cNvSpPr txBox="1"/>
+          <p:nvPr/>
+        </p:nvSpPr>
+        <p:spPr>
+          <a:xfrm>
+            <a:off x="-320040" y="1380744"/>
+            <a:ext cx="777240" cy="208407"/>
+          </a:xfrm>
+          <a:prstGeom prst="rect">
+            <a:avLst/>
+          </a:prstGeom>
+          <a:noFill/>
+          <a:effectLst/>
+        </p:spPr>
+        <p:txBody>
+          <a:bodyPr wrap="none" lIns="18288" rIns="18288" tIns="18288" bIns="18288" anchor="t">
+            <a:spAutoFit/>
+          </a:bodyPr>
+          <a:lstStyle/>
+          <a:p>
+            <a:pPr algn="r">
+              <a:spcAft>
+                <a:spcPts val="0"/>
+              </a:spcAft>
+            </a:pPr>
+            <a:r>
+              <a:rPr sz="1050" b="0" i="0">
+                <a:solidFill>
+                  <a:srgbClr val="B4C7D2"/>
+                </a:solidFill>
+                <a:latin typeface="Arial"/>
+              </a:rPr>
+              <a:t>125</a:t>
+            </a:r>
+          </a:p>
+        </p:txBody>
+      </p:sp>
+      <p:sp>
+        <p:nvSpPr>
+          <p:cNvPr id="24" name="A-E11 rect 22" descr="sci-ppt:o022"/>
+          <p:cNvSpPr/>
+          <p:nvPr/>
+        </p:nvSpPr>
+        <p:spPr>
+          <a:xfrm>
+            <a:off x="727862" y="2121408"/>
+            <a:ext cx="921715" cy="2633472"/>
+          </a:xfrm>
+          <a:prstGeom prst="rect">
+            <a:avLst/>
+          </a:prstGeom>
+          <a:solidFill>
+            <a:srgbClr val="8EDBD4">
+              <a:alpha val="85000"/>
+            </a:srgbClr>
+          </a:solidFill>
+          <a:ln w="12700">
+            <a:solidFill>
+              <a:srgbClr val="8EDBD4">
+                <a:alpha val="85000"/>
+              </a:srgbClr>
+            </a:solidFill>
+          </a:ln>
+          <a:effectLst/>
+        </p:spPr>
+        <p:txBody>
+          <a:bodyPr rtlCol="0" anchor="ctr"/>
+          <a:lstStyle/>
+          <a:p>
+            <a:pPr algn="ctr"/>
+          </a:p>
+        </p:txBody>
+      </p:sp>
+      <p:sp>
+        <p:nvSpPr>
+          <p:cNvPr id="25" name="A-E11 text 23" descr="sci-ppt:o023"/>
+          <p:cNvSpPr txBox="1"/>
+          <p:nvPr/>
+        </p:nvSpPr>
+        <p:spPr>
+          <a:xfrm>
+            <a:off x="499262" y="1847088"/>
+            <a:ext cx="1378915" cy="223900"/>
+          </a:xfrm>
+          <a:prstGeom prst="rect">
+            <a:avLst/>
+          </a:prstGeom>
+          <a:noFill/>
+          <a:effectLst/>
+        </p:spPr>
+        <p:txBody>
+          <a:bodyPr wrap="none" lIns="18288" rIns="18288" tIns="18288" bIns="18288" anchor="t">
+            <a:spAutoFit/>
+          </a:bodyPr>
+          <a:lstStyle/>
+          <a:p>
+            <a:pPr algn="ctr">
+              <a:spcAft>
+                <a:spcPts val="0"/>
+              </a:spcAft>
+            </a:pPr>
+            <a:r>
+              <a:rPr sz="1150" b="1" i="0">
+                <a:solidFill>
+                  <a:srgbClr val="E7F0F3"/>
+                </a:solidFill>
+                <a:latin typeface="Arial"/>
+              </a:rPr>
+              <a:t>100.0</a:t>
+            </a:r>
+          </a:p>
+        </p:txBody>
+      </p:sp>
+      <p:sp>
+        <p:nvSpPr>
+          <p:cNvPr id="26" name="A-E11 text 24" descr="sci-ppt:o024"/>
+          <p:cNvSpPr txBox="1"/>
+          <p:nvPr/>
+        </p:nvSpPr>
+        <p:spPr>
+          <a:xfrm>
+            <a:off x="453542" y="4828032"/>
+            <a:ext cx="1470355" cy="216153"/>
+          </a:xfrm>
+          <a:prstGeom prst="rect">
+            <a:avLst/>
+          </a:prstGeom>
+          <a:noFill/>
+          <a:effectLst/>
+        </p:spPr>
+        <p:txBody>
+          <a:bodyPr wrap="none" lIns="18288" rIns="18288" tIns="18288" bIns="18288" anchor="t">
+            <a:spAutoFit/>
+          </a:bodyPr>
+          <a:lstStyle/>
+          <a:p>
+            <a:pPr algn="ctr">
+              <a:spcAft>
+                <a:spcPts val="0"/>
+              </a:spcAft>
+            </a:pPr>
+            <a:r>
+              <a:rPr sz="1100" b="0" i="0">
+                <a:solidFill>
+                  <a:srgbClr val="B4C7D2"/>
+                </a:solidFill>
+                <a:latin typeface="Arial"/>
+              </a:rPr>
+              <a:t>p_b − p_∞</a:t>
+            </a:r>
+          </a:p>
+        </p:txBody>
+      </p:sp>
+      <p:sp>
+        <p:nvSpPr>
+          <p:cNvPr id="27" name="A-E11 rect 25" descr="sci-ppt:o025"/>
+          <p:cNvSpPr/>
+          <p:nvPr/>
+        </p:nvSpPr>
+        <p:spPr>
+          <a:xfrm>
+            <a:off x="2008022" y="2121408"/>
+            <a:ext cx="921715" cy="126406"/>
+          </a:xfrm>
+          <a:prstGeom prst="rect">
+            <a:avLst/>
+          </a:prstGeom>
+          <a:solidFill>
+            <a:srgbClr val="F2B880">
+              <a:alpha val="85000"/>
+            </a:srgbClr>
+          </a:solidFill>
+          <a:ln w="12700">
+            <a:solidFill>
+              <a:srgbClr val="F2B880">
+                <a:alpha val="85000"/>
+              </a:srgbClr>
+            </a:solidFill>
+          </a:ln>
+          <a:effectLst/>
+        </p:spPr>
+        <p:txBody>
+          <a:bodyPr rtlCol="0" anchor="ctr"/>
+          <a:lstStyle/>
+          <a:p>
+            <a:pPr algn="ctr"/>
+          </a:p>
+        </p:txBody>
+      </p:sp>
+      <p:sp>
+        <p:nvSpPr>
+          <p:cNvPr id="28" name="A-E11 text 26" descr="sci-ppt:o026"/>
+          <p:cNvSpPr txBox="1"/>
+          <p:nvPr/>
+        </p:nvSpPr>
+        <p:spPr>
+          <a:xfrm>
+            <a:off x="1779422" y="1847088"/>
+            <a:ext cx="1378915" cy="223900"/>
+          </a:xfrm>
+          <a:prstGeom prst="rect">
+            <a:avLst/>
+          </a:prstGeom>
+          <a:noFill/>
+          <a:effectLst/>
+        </p:spPr>
+        <p:txBody>
+          <a:bodyPr wrap="none" lIns="18288" rIns="18288" tIns="18288" bIns="18288" anchor="t">
+            <a:spAutoFit/>
+          </a:bodyPr>
+          <a:lstStyle/>
+          <a:p>
+            <a:pPr algn="ctr">
+              <a:spcAft>
+                <a:spcPts val="0"/>
+              </a:spcAft>
+            </a:pPr>
+            <a:r>
+              <a:rPr sz="1150" b="1" i="0">
+                <a:solidFill>
+                  <a:srgbClr val="E7F0F3"/>
+                </a:solidFill>
+                <a:latin typeface="Arial"/>
+              </a:rPr>
+              <a:t>-4.8</a:t>
+            </a:r>
+          </a:p>
+        </p:txBody>
+      </p:sp>
+      <p:sp>
+        <p:nvSpPr>
+          <p:cNvPr id="29" name="A-E11 text 27" descr="sci-ppt:o027"/>
+          <p:cNvSpPr txBox="1"/>
+          <p:nvPr/>
+        </p:nvSpPr>
+        <p:spPr>
+          <a:xfrm>
+            <a:off x="1733702" y="4828032"/>
+            <a:ext cx="1470355" cy="216153"/>
+          </a:xfrm>
+          <a:prstGeom prst="rect">
+            <a:avLst/>
+          </a:prstGeom>
+          <a:noFill/>
+          <a:effectLst/>
+        </p:spPr>
+        <p:txBody>
+          <a:bodyPr wrap="none" lIns="18288" rIns="18288" tIns="18288" bIns="18288" anchor="t">
+            <a:spAutoFit/>
+          </a:bodyPr>
+          <a:lstStyle/>
+          <a:p>
+            <a:pPr algn="ctr">
+              <a:spcAft>
+                <a:spcPts val="0"/>
+              </a:spcAft>
+            </a:pPr>
+            <a:r>
+              <a:rPr sz="1100" b="0" i="0">
+                <a:solidFill>
+                  <a:srgbClr val="B4C7D2"/>
+                </a:solidFill>
+                <a:latin typeface="Arial"/>
+              </a:rPr>
+              <a:t>− 2σ/R</a:t>
+            </a:r>
+          </a:p>
+        </p:txBody>
+      </p:sp>
+      <p:sp>
+        <p:nvSpPr>
+          <p:cNvPr id="30" name="A-E11 rect 28" descr="sci-ppt:o028"/>
+          <p:cNvSpPr/>
+          <p:nvPr/>
+        </p:nvSpPr>
+        <p:spPr>
+          <a:xfrm>
+            <a:off x="3288182" y="2247814"/>
+            <a:ext cx="921715" cy="1140968"/>
+          </a:xfrm>
+          <a:prstGeom prst="rect">
+            <a:avLst/>
+          </a:prstGeom>
+          <a:solidFill>
+            <a:srgbClr val="F28BA0">
+              <a:alpha val="85000"/>
+            </a:srgbClr>
+          </a:solidFill>
+          <a:ln w="12700">
+            <a:solidFill>
+              <a:srgbClr val="F28BA0">
+                <a:alpha val="85000"/>
+              </a:srgbClr>
+            </a:solidFill>
+          </a:ln>
+          <a:effectLst/>
+        </p:spPr>
+        <p:txBody>
+          <a:bodyPr rtlCol="0" anchor="ctr"/>
+          <a:lstStyle/>
+          <a:p>
+            <a:pPr algn="ctr"/>
+          </a:p>
+        </p:txBody>
+      </p:sp>
+      <p:sp>
+        <p:nvSpPr>
+          <p:cNvPr id="31" name="A-E11 text 29" descr="sci-ppt:o029"/>
+          <p:cNvSpPr txBox="1"/>
+          <p:nvPr/>
+        </p:nvSpPr>
+        <p:spPr>
+          <a:xfrm>
+            <a:off x="3059582" y="1973494"/>
+            <a:ext cx="1378915" cy="223900"/>
+          </a:xfrm>
+          <a:prstGeom prst="rect">
+            <a:avLst/>
+          </a:prstGeom>
+          <a:noFill/>
+          <a:effectLst/>
+        </p:spPr>
+        <p:txBody>
+          <a:bodyPr wrap="none" lIns="18288" rIns="18288" tIns="18288" bIns="18288" anchor="t">
+            <a:spAutoFit/>
+          </a:bodyPr>
+          <a:lstStyle/>
+          <a:p>
+            <a:pPr algn="ctr">
+              <a:spcAft>
+                <a:spcPts val="0"/>
+              </a:spcAft>
+            </a:pPr>
+            <a:r>
+              <a:rPr sz="1150" b="1" i="0">
+                <a:solidFill>
+                  <a:srgbClr val="E7F0F3"/>
+                </a:solidFill>
+                <a:latin typeface="Arial"/>
+              </a:rPr>
+              <a:t>-43.3</a:t>
+            </a:r>
+          </a:p>
+        </p:txBody>
+      </p:sp>
+      <p:sp>
+        <p:nvSpPr>
+          <p:cNvPr id="32" name="A-E11 text 30" descr="sci-ppt:o030"/>
+          <p:cNvSpPr txBox="1"/>
+          <p:nvPr/>
+        </p:nvSpPr>
+        <p:spPr>
+          <a:xfrm>
+            <a:off x="3013862" y="4828032"/>
+            <a:ext cx="1470355" cy="216153"/>
+          </a:xfrm>
+          <a:prstGeom prst="rect">
+            <a:avLst/>
+          </a:prstGeom>
+          <a:noFill/>
+          <a:effectLst/>
+        </p:spPr>
+        <p:txBody>
+          <a:bodyPr wrap="none" lIns="18288" rIns="18288" tIns="18288" bIns="18288" anchor="t">
+            <a:spAutoFit/>
+          </a:bodyPr>
+          <a:lstStyle/>
+          <a:p>
+            <a:pPr algn="ctr">
+              <a:spcAft>
+                <a:spcPts val="0"/>
+              </a:spcAft>
+            </a:pPr>
+            <a:r>
+              <a:rPr sz="1100" b="0" i="0">
+                <a:solidFill>
+                  <a:srgbClr val="B4C7D2"/>
+                </a:solidFill>
+                <a:latin typeface="Arial"/>
+              </a:rPr>
+              <a:t>− pₑₗ</a:t>
+            </a:r>
+          </a:p>
+        </p:txBody>
+      </p:sp>
+      <p:sp>
+        <p:nvSpPr>
+          <p:cNvPr id="33" name="A-E11 rect 31" descr="sci-ppt:o031"/>
+          <p:cNvSpPr/>
+          <p:nvPr/>
+        </p:nvSpPr>
+        <p:spPr>
+          <a:xfrm>
+            <a:off x="4568342" y="3037653"/>
+            <a:ext cx="921715" cy="351129"/>
+          </a:xfrm>
+          <a:prstGeom prst="rect">
+            <a:avLst/>
+          </a:prstGeom>
+          <a:solidFill>
+            <a:srgbClr val="7FC8F8">
+              <a:alpha val="85000"/>
+            </a:srgbClr>
+          </a:solidFill>
+          <a:ln w="12700">
+            <a:solidFill>
+              <a:srgbClr val="7FC8F8">
+                <a:alpha val="85000"/>
+              </a:srgbClr>
+            </a:solidFill>
+          </a:ln>
+          <a:effectLst/>
+        </p:spPr>
+        <p:txBody>
+          <a:bodyPr rtlCol="0" anchor="ctr"/>
+          <a:lstStyle/>
+          <a:p>
+            <a:pPr algn="ctr"/>
+          </a:p>
+        </p:txBody>
+      </p:sp>
+      <p:sp>
+        <p:nvSpPr>
+          <p:cNvPr id="34" name="A-E11 text 32" descr="sci-ppt:o032"/>
+          <p:cNvSpPr txBox="1"/>
+          <p:nvPr/>
+        </p:nvSpPr>
+        <p:spPr>
+          <a:xfrm>
+            <a:off x="4339742" y="2763333"/>
+            <a:ext cx="1378915" cy="223900"/>
+          </a:xfrm>
+          <a:prstGeom prst="rect">
+            <a:avLst/>
+          </a:prstGeom>
+          <a:noFill/>
+          <a:effectLst/>
+        </p:spPr>
+        <p:txBody>
+          <a:bodyPr wrap="none" lIns="18288" rIns="18288" tIns="18288" bIns="18288" anchor="t">
+            <a:spAutoFit/>
+          </a:bodyPr>
+          <a:lstStyle/>
+          <a:p>
+            <a:pPr algn="ctr">
+              <a:spcAft>
+                <a:spcPts val="0"/>
+              </a:spcAft>
+            </a:pPr>
+            <a:r>
+              <a:rPr sz="1150" b="1" i="0">
+                <a:solidFill>
+                  <a:srgbClr val="E7F0F3"/>
+                </a:solidFill>
+                <a:latin typeface="Arial"/>
+              </a:rPr>
+              <a:t>+13.3</a:t>
+            </a:r>
+          </a:p>
+        </p:txBody>
+      </p:sp>
+      <p:sp>
+        <p:nvSpPr>
+          <p:cNvPr id="35" name="A-E11 text 33" descr="sci-ppt:o033"/>
+          <p:cNvSpPr txBox="1"/>
+          <p:nvPr/>
+        </p:nvSpPr>
+        <p:spPr>
+          <a:xfrm>
+            <a:off x="4294022" y="4828032"/>
+            <a:ext cx="1470355" cy="216153"/>
+          </a:xfrm>
+          <a:prstGeom prst="rect">
+            <a:avLst/>
+          </a:prstGeom>
+          <a:noFill/>
+          <a:effectLst/>
+        </p:spPr>
+        <p:txBody>
+          <a:bodyPr wrap="none" lIns="18288" rIns="18288" tIns="18288" bIns="18288" anchor="t">
+            <a:spAutoFit/>
+          </a:bodyPr>
+          <a:lstStyle/>
+          <a:p>
+            <a:pPr algn="ctr">
+              <a:spcAft>
+                <a:spcPts val="0"/>
+              </a:spcAft>
+            </a:pPr>
+            <a:r>
+              <a:rPr sz="1100" b="0" i="0">
+                <a:solidFill>
+                  <a:srgbClr val="B4C7D2"/>
+                </a:solidFill>
+                <a:latin typeface="Arial"/>
+              </a:rPr>
+              <a:t>− 4η_gṘ/R</a:t>
+            </a:r>
+          </a:p>
+        </p:txBody>
+      </p:sp>
+      <p:sp>
+        <p:nvSpPr>
+          <p:cNvPr id="36" name="A-E11 rect 34" descr="sci-ppt:o034"/>
+          <p:cNvSpPr/>
+          <p:nvPr/>
+        </p:nvSpPr>
+        <p:spPr>
+          <a:xfrm>
+            <a:off x="5848502" y="3037653"/>
+            <a:ext cx="921715" cy="1717226"/>
+          </a:xfrm>
+          <a:prstGeom prst="rect">
+            <a:avLst/>
+          </a:prstGeom>
+          <a:solidFill>
+            <a:srgbClr val="A8E6A1">
+              <a:alpha val="85000"/>
+            </a:srgbClr>
+          </a:solidFill>
+          <a:ln w="12700">
+            <a:solidFill>
+              <a:srgbClr val="A8E6A1">
+                <a:alpha val="85000"/>
+              </a:srgbClr>
+            </a:solidFill>
+          </a:ln>
+          <a:effectLst/>
+        </p:spPr>
+        <p:txBody>
+          <a:bodyPr rtlCol="0" anchor="ctr"/>
+          <a:lstStyle/>
+          <a:p>
+            <a:pPr algn="ctr"/>
+          </a:p>
+        </p:txBody>
+      </p:sp>
+      <p:sp>
+        <p:nvSpPr>
+          <p:cNvPr id="37" name="A-E11 text 35" descr="sci-ppt:o035"/>
+          <p:cNvSpPr txBox="1"/>
+          <p:nvPr/>
+        </p:nvSpPr>
+        <p:spPr>
+          <a:xfrm>
+            <a:off x="5619902" y="2763333"/>
+            <a:ext cx="1378915" cy="223900"/>
+          </a:xfrm>
+          <a:prstGeom prst="rect">
+            <a:avLst/>
+          </a:prstGeom>
+          <a:noFill/>
+          <a:effectLst/>
+        </p:spPr>
+        <p:txBody>
+          <a:bodyPr wrap="none" lIns="18288" rIns="18288" tIns="18288" bIns="18288" anchor="t">
+            <a:spAutoFit/>
+          </a:bodyPr>
+          <a:lstStyle/>
+          <a:p>
+            <a:pPr algn="ctr">
+              <a:spcAft>
+                <a:spcPts val="0"/>
+              </a:spcAft>
+            </a:pPr>
+            <a:r>
+              <a:rPr sz="1150" b="1" i="0">
+                <a:solidFill>
+                  <a:srgbClr val="E7F0F3"/>
+                </a:solidFill>
+                <a:latin typeface="Arial"/>
+              </a:rPr>
+              <a:t>65.2</a:t>
+            </a:r>
+          </a:p>
+        </p:txBody>
+      </p:sp>
+      <p:sp>
+        <p:nvSpPr>
+          <p:cNvPr id="38" name="A-E11 text 36" descr="sci-ppt:o036"/>
+          <p:cNvSpPr txBox="1"/>
+          <p:nvPr/>
+        </p:nvSpPr>
+        <p:spPr>
+          <a:xfrm>
+            <a:off x="5574182" y="4828032"/>
+            <a:ext cx="1470355" cy="216153"/>
+          </a:xfrm>
+          <a:prstGeom prst="rect">
+            <a:avLst/>
+          </a:prstGeom>
+          <a:noFill/>
+          <a:effectLst/>
+        </p:spPr>
+        <p:txBody>
+          <a:bodyPr wrap="none" lIns="18288" rIns="18288" tIns="18288" bIns="18288" anchor="t">
+            <a:spAutoFit/>
+          </a:bodyPr>
+          <a:lstStyle/>
+          <a:p>
+            <a:pPr algn="ctr">
+              <a:spcAft>
+                <a:spcPts val="0"/>
+              </a:spcAft>
+            </a:pPr>
+            <a:r>
+              <a:rPr sz="1100" b="0" i="0">
+                <a:solidFill>
+                  <a:srgbClr val="B4C7D2"/>
+                </a:solidFill>
+                <a:latin typeface="Arial"/>
+              </a:rPr>
+              <a:t>= ρ_g(RR̈ + 3Ṙ²/2)</a:t>
+            </a:r>
+          </a:p>
+        </p:txBody>
+      </p:sp>
+      <p:sp>
+        <p:nvSpPr>
+          <p:cNvPr id="39" name="A-E11 round_rect 37" descr="sci-ppt:o037"/>
+          <p:cNvSpPr/>
+          <p:nvPr/>
+        </p:nvSpPr>
+        <p:spPr>
+          <a:xfrm>
+            <a:off x="7315200" y="914400"/>
+            <a:ext cx="4526280" cy="4023360"/>
+          </a:xfrm>
+          <a:prstGeom prst="roundRect">
+            <a:avLst/>
+          </a:prstGeom>
+          <a:solidFill>
+            <a:srgbClr val="213E4B"/>
+          </a:solidFill>
+          <a:ln w="20320">
             <a:solidFill>
               <a:srgbClr val="8EDBD4"/>
             </a:solidFill>
-            <a:headEnd type="none" w="med" len="med"/>
-            <a:tailEnd type="triangle" w="med" len="med"/>
           </a:ln>
           <a:effectLst/>
         </p:spPr>
-      </p:cxnSp>
-      <p:sp>
-        <p:nvSpPr>
-          <p:cNvPr id="6" name="text 4" descr="sci-ppt:obj-004"/>
+        <p:txBody>
+          <a:bodyPr rtlCol="0" anchor="ctr"/>
+          <a:lstStyle/>
+          <a:p>
+            <a:pPr algn="ctr"/>
+          </a:p>
+        </p:txBody>
+      </p:sp>
+      <p:sp>
+        <p:nvSpPr>
+          <p:cNvPr id="40" name="A-E11 text 38" descr="sci-ppt:o038"/>
           <p:cNvSpPr txBox="1"/>
           <p:nvPr/>
         </p:nvSpPr>
         <p:spPr>
           <a:xfrm>
-            <a:off x="1755648" y="1271016"/>
-            <a:ext cx="1097280" cy="310896"/>
+            <a:off x="7424927" y="969264"/>
+            <a:ext cx="4306824" cy="254889"/>
           </a:xfrm>
           <a:prstGeom prst="rect">
             <a:avLst/>
@@ -3240,7 +4354,7 @@
           <a:effectLst/>
         </p:spPr>
         <p:txBody>
-          <a:bodyPr wrap="none" lIns="0" rIns="0" tIns="0" bIns="0" anchor="ctr">
+          <a:bodyPr wrap="none" lIns="18288" rIns="18288" tIns="18288" bIns="18288" anchor="t">
             <a:spAutoFit/>
           </a:bodyPr>
           <a:lstStyle/>
@@ -3251,51 +4365,67 @@
               </a:spcAft>
             </a:pPr>
             <a:r>
-              <a:rPr sz="1296" b="0" i="0">
+              <a:rPr sz="1350" b="1" i="0">
+                <a:solidFill>
+                  <a:srgbClr val="8EDBD4"/>
+                </a:solidFill>
+                <a:latin typeface="Arial"/>
+              </a:rPr>
+              <a:t>Spherical radial control</a:t>
+            </a:r>
+          </a:p>
+        </p:txBody>
+      </p:sp>
+      <p:sp>
+        <p:nvSpPr>
+          <p:cNvPr id="41" name="A-E11 text 39" descr="sci-ppt:o039"/>
+          <p:cNvSpPr txBox="1"/>
+          <p:nvPr/>
+        </p:nvSpPr>
+        <p:spPr>
+          <a:xfrm>
+            <a:off x="7452360" y="1371600"/>
+            <a:ext cx="4297680" cy="223900"/>
+          </a:xfrm>
+          <a:prstGeom prst="rect">
+            <a:avLst/>
+          </a:prstGeom>
+          <a:noFill/>
+          <a:effectLst/>
+        </p:spPr>
+        <p:txBody>
+          <a:bodyPr wrap="none" lIns="18288" rIns="18288" tIns="18288" bIns="18288" anchor="t">
+            <a:spAutoFit/>
+          </a:bodyPr>
+          <a:lstStyle/>
+          <a:p>
+            <a:pPr algn="l">
+              <a:spcAft>
+                <a:spcPts val="0"/>
+              </a:spcAft>
+            </a:pPr>
+            <a:r>
+              <a:rPr sz="1150" b="1" i="0">
                 <a:solidFill>
                   <a:srgbClr val="E7F0F3"/>
                 </a:solidFill>
                 <a:latin typeface="Arial"/>
               </a:rPr>
-              <a:t>Rref</a:t>
-            </a:r>
-          </a:p>
-        </p:txBody>
-      </p:sp>
-      <p:cxnSp>
-        <p:nvCxnSpPr>
-          <p:cNvPr id="7" name="arrow 5" descr="sci-ppt:obj-005"/>
-          <p:cNvCxnSpPr/>
-          <p:nvPr/>
-        </p:nvCxnSpPr>
-        <p:spPr>
-          <a:xfrm>
-            <a:off x="1792224" y="1645920"/>
-            <a:ext cx="517262" cy="517262"/>
-          </a:xfrm>
-          <a:prstGeom prst="line">
-            <a:avLst/>
-          </a:prstGeom>
-          <a:ln w="21590">
-            <a:solidFill>
-              <a:srgbClr val="8EDBD4"/>
-            </a:solidFill>
-            <a:headEnd type="none" w="med" len="med"/>
-            <a:tailEnd type="triangle" w="med" len="med"/>
-          </a:ln>
-          <a:effectLst/>
-        </p:spPr>
-      </p:cxnSp>
-      <p:sp>
-        <p:nvSpPr>
-          <p:cNvPr id="8" name="text 6" descr="sci-ppt:obj-006"/>
+              <a:t>ρ_g(RR̈ + 3Ṙ²/2) = p_b − p_∞ − 2σ/R − pₑₗ − 4η_gṘ/R</a:t>
+            </a:r>
+          </a:p>
+        </p:txBody>
+      </p:sp>
+      <p:sp>
+        <p:nvSpPr>
+          <p:cNvPr id="42" name="A-E11 text 40" descr="sci-ppt:o040"/>
           <p:cNvSpPr txBox="1"/>
           <p:nvPr/>
         </p:nvSpPr>
         <p:spPr>
           <a:xfrm>
-            <a:off x="2304288" y="2139696"/>
-            <a:ext cx="822960" cy="310896"/>
+            <a:off x="7653528" y="2286000"/>
+            <a:ext cx="4096512" cy="231648"/>
           </a:xfrm>
           <a:prstGeom prst="rect">
             <a:avLst/>
@@ -3304,7 +4434,7 @@
           <a:effectLst/>
         </p:spPr>
         <p:txBody>
-          <a:bodyPr wrap="none" lIns="0" rIns="0" tIns="0" bIns="0" anchor="ctr">
+          <a:bodyPr wrap="none" lIns="18288" rIns="18288" tIns="18288" bIns="18288" anchor="t">
             <a:spAutoFit/>
           </a:bodyPr>
           <a:lstStyle/>
@@ -3315,35 +4445,37 @@
               </a:spcAft>
             </a:pPr>
             <a:r>
-              <a:rPr sz="1296" b="0" i="0">
+              <a:rPr sz="1200" b="0" i="0">
                 <a:solidFill>
                   <a:srgbClr val="E7F0F3"/>
                 </a:solidFill>
                 <a:latin typeface="Arial"/>
               </a:rPr>
-              <a:t>r₀</a:t>
-            </a:r>
-          </a:p>
-        </p:txBody>
-      </p:sp>
-      <p:sp>
-        <p:nvSpPr>
-          <p:cNvPr id="9" name="ellipse 7" descr="sci-ppt:obj-007"/>
+              <a:t>Left: inertia of the surrounding gel.</a:t>
+            </a:r>
+          </a:p>
+        </p:txBody>
+      </p:sp>
+      <p:sp>
+        <p:nvSpPr>
+          <p:cNvPr id="43" name="A-E11 ellipse 41" descr="sci-ppt:o041"/>
           <p:cNvSpPr/>
           <p:nvPr/>
         </p:nvSpPr>
         <p:spPr>
           <a:xfrm>
-            <a:off x="4682139" y="750219"/>
-            <a:ext cx="1791401" cy="1791401"/>
+            <a:off x="7484364" y="2339340"/>
+            <a:ext cx="82296" cy="82296"/>
           </a:xfrm>
           <a:prstGeom prst="ellipse">
             <a:avLst/>
           </a:prstGeom>
-          <a:noFill/>
-          <a:ln w="17780">
+          <a:solidFill>
+            <a:srgbClr val="8EDBD4"/>
+          </a:solidFill>
+          <a:ln w="12700">
             <a:solidFill>
-              <a:srgbClr val="B4C7D2"/>
+              <a:srgbClr val="8EDBD4"/>
             </a:solidFill>
           </a:ln>
           <a:effectLst/>
@@ -3358,70 +4490,14 @@
       </p:sp>
       <p:sp>
         <p:nvSpPr>
-          <p:cNvPr id="10" name="ellipse 8" descr="sci-ppt:obj-008"/>
-          <p:cNvSpPr/>
-          <p:nvPr/>
-        </p:nvSpPr>
-        <p:spPr>
-          <a:xfrm>
-            <a:off x="4864608" y="932688"/>
-            <a:ext cx="1426464" cy="1426464"/>
-          </a:xfrm>
-          <a:prstGeom prst="ellipse">
-            <a:avLst/>
-          </a:prstGeom>
-          <a:solidFill>
-            <a:srgbClr val="213E4B"/>
-          </a:solidFill>
-          <a:ln w="17780">
-            <a:solidFill>
-              <a:srgbClr val="B4C7D2"/>
-            </a:solidFill>
-          </a:ln>
-          <a:effectLst/>
-        </p:spPr>
-        <p:txBody>
-          <a:bodyPr rtlCol="0" anchor="ctr"/>
-          <a:lstStyle/>
-          <a:p>
-            <a:pPr algn="ctr"/>
-          </a:p>
-        </p:txBody>
-      </p:sp>
-      <p:cxnSp>
-        <p:nvCxnSpPr>
-          <p:cNvPr id="11" name="arrow 9" descr="sci-ppt:obj-009"/>
-          <p:cNvCxnSpPr/>
-          <p:nvPr/>
-        </p:nvCxnSpPr>
-        <p:spPr>
-          <a:xfrm>
-            <a:off x="5577840" y="1645920"/>
-            <a:ext cx="713232" cy="0"/>
-          </a:xfrm>
-          <a:prstGeom prst="line">
-            <a:avLst/>
-          </a:prstGeom>
-          <a:ln w="21590">
-            <a:solidFill>
-              <a:srgbClr val="8EDBD4"/>
-            </a:solidFill>
-            <a:headEnd type="none" w="med" len="med"/>
-            <a:tailEnd type="triangle" w="med" len="med"/>
-          </a:ln>
-          <a:effectLst/>
-        </p:spPr>
-      </p:cxnSp>
-      <p:sp>
-        <p:nvSpPr>
-          <p:cNvPr id="12" name="text 10" descr="sci-ppt:obj-010"/>
+          <p:cNvPr id="44" name="A-E11 text 42" descr="sci-ppt:o042"/>
           <p:cNvSpPr txBox="1"/>
           <p:nvPr/>
         </p:nvSpPr>
         <p:spPr>
           <a:xfrm>
-            <a:off x="5952744" y="1271016"/>
-            <a:ext cx="640080" cy="310896"/>
+            <a:off x="7653528" y="2563368"/>
+            <a:ext cx="4096512" cy="417576"/>
           </a:xfrm>
           <a:prstGeom prst="rect">
             <a:avLst/>
@@ -3430,7 +4506,7 @@
           <a:effectLst/>
         </p:spPr>
         <p:txBody>
-          <a:bodyPr wrap="none" lIns="0" rIns="0" tIns="0" bIns="0" anchor="ctr">
+          <a:bodyPr wrap="none" lIns="18288" rIns="18288" tIns="18288" bIns="18288" anchor="t">
             <a:spAutoFit/>
           </a:bodyPr>
           <a:lstStyle/>
@@ -3441,63 +4517,15 @@
               </a:spcAft>
             </a:pPr>
             <a:r>
-              <a:rPr sz="1296" b="0" i="0">
+              <a:rPr sz="1200" b="0" i="0">
                 <a:solidFill>
                   <a:srgbClr val="E7F0F3"/>
                 </a:solidFill>
                 <a:latin typeface="Arial"/>
               </a:rPr>
-              <a:t>R</a:t>
-            </a:r>
-          </a:p>
-        </p:txBody>
-      </p:sp>
-      <p:cxnSp>
-        <p:nvCxnSpPr>
-          <p:cNvPr id="13" name="arrow 11" descr="sci-ppt:obj-011"/>
-          <p:cNvCxnSpPr/>
-          <p:nvPr/>
-        </p:nvCxnSpPr>
-        <p:spPr>
-          <a:xfrm>
-            <a:off x="5577840" y="1645920"/>
-            <a:ext cx="633355" cy="633355"/>
-          </a:xfrm>
-          <a:prstGeom prst="line">
-            <a:avLst/>
-          </a:prstGeom>
-          <a:ln w="21590">
-            <a:solidFill>
-              <a:srgbClr val="8EDBD4"/>
-            </a:solidFill>
-            <a:headEnd type="none" w="med" len="med"/>
-            <a:tailEnd type="triangle" w="med" len="med"/>
-          </a:ln>
-          <a:effectLst/>
-        </p:spPr>
-      </p:cxnSp>
-      <p:sp>
-        <p:nvSpPr>
-          <p:cNvPr id="14" name="text 12" descr="sci-ppt:obj-012"/>
-          <p:cNvSpPr txBox="1"/>
-          <p:nvPr/>
-        </p:nvSpPr>
-        <p:spPr>
-          <a:xfrm>
-            <a:off x="6373368" y="2231136"/>
-            <a:ext cx="640080" cy="310896"/>
-          </a:xfrm>
-          <a:prstGeom prst="rect">
-            <a:avLst/>
-          </a:prstGeom>
-          <a:noFill/>
-          <a:effectLst/>
-        </p:spPr>
-        <p:txBody>
-          <a:bodyPr wrap="none" lIns="0" rIns="0" tIns="0" bIns="0" anchor="ctr">
-            <a:spAutoFit/>
-          </a:bodyPr>
-          <a:lstStyle/>
+              <a:t>Right: driving overpressure minus capillary,</a:t>
+            </a:r>
+          </a:p>
           <a:p>
             <a:pPr algn="l">
               <a:spcAft>
@@ -3505,51 +4533,59 @@
               </a:spcAft>
             </a:pPr>
             <a:r>
-              <a:rPr sz="1296" b="0" i="0">
+              <a:rPr sz="1200" b="0" i="0">
                 <a:solidFill>
                   <a:srgbClr val="E7F0F3"/>
                 </a:solidFill>
                 <a:latin typeface="Arial"/>
               </a:rPr>
-              <a:t>r</a:t>
-            </a:r>
-          </a:p>
-        </p:txBody>
-      </p:sp>
-      <p:cxnSp>
-        <p:nvCxnSpPr>
-          <p:cNvPr id="15" name="arrow 13" descr="sci-ppt:obj-013"/>
-          <p:cNvCxnSpPr/>
+              <a:t>elastic and viscous resistance.</a:t>
+            </a:r>
+          </a:p>
+        </p:txBody>
+      </p:sp>
+      <p:sp>
+        <p:nvSpPr>
+          <p:cNvPr id="45" name="A-E11 ellipse 43" descr="sci-ppt:o043"/>
+          <p:cNvSpPr/>
           <p:nvPr/>
-        </p:nvCxnSpPr>
-        <p:spPr>
-          <a:xfrm>
-            <a:off x="2697480" y="1645920"/>
-            <a:ext cx="1691640" cy="0"/>
-          </a:xfrm>
-          <a:prstGeom prst="line">
-            <a:avLst/>
-          </a:prstGeom>
-          <a:ln w="21590">
+        </p:nvSpPr>
+        <p:spPr>
+          <a:xfrm>
+            <a:off x="7484364" y="2616708"/>
+            <a:ext cx="82296" cy="82296"/>
+          </a:xfrm>
+          <a:prstGeom prst="ellipse">
+            <a:avLst/>
+          </a:prstGeom>
+          <a:solidFill>
+            <a:srgbClr val="8EDBD4"/>
+          </a:solidFill>
+          <a:ln w="12700">
             <a:solidFill>
               <a:srgbClr val="8EDBD4"/>
             </a:solidFill>
-            <a:headEnd type="none" w="med" len="med"/>
-            <a:tailEnd type="triangle" w="med" len="med"/>
           </a:ln>
           <a:effectLst/>
         </p:spPr>
-      </p:cxnSp>
-      <p:sp>
-        <p:nvSpPr>
-          <p:cNvPr id="16" name="text 14" descr="sci-ppt:obj-014"/>
+        <p:txBody>
+          <a:bodyPr rtlCol="0" anchor="ctr"/>
+          <a:lstStyle/>
+          <a:p>
+            <a:pPr algn="ctr"/>
+          </a:p>
+        </p:txBody>
+      </p:sp>
+      <p:sp>
+        <p:nvSpPr>
+          <p:cNvPr id="46" name="A-E11 text 44" descr="sci-ppt:o044"/>
           <p:cNvSpPr txBox="1"/>
           <p:nvPr/>
         </p:nvSpPr>
         <p:spPr>
           <a:xfrm>
-            <a:off x="2834640" y="1143000"/>
-            <a:ext cx="2286000" cy="310896"/>
+            <a:off x="7653528" y="3026663"/>
+            <a:ext cx="4096512" cy="417576"/>
           </a:xfrm>
           <a:prstGeom prst="rect">
             <a:avLst/>
@@ -3558,7 +4594,7 @@
           <a:effectLst/>
         </p:spPr>
         <p:txBody>
-          <a:bodyPr wrap="none" lIns="0" rIns="0" tIns="0" bIns="0" anchor="ctr">
+          <a:bodyPr wrap="none" lIns="18288" rIns="18288" tIns="18288" bIns="18288" anchor="t">
             <a:spAutoFit/>
           </a:bodyPr>
           <a:lstStyle/>
@@ -3569,39 +4605,15 @@
               </a:spcAft>
             </a:pPr>
             <a:r>
-              <a:rPr sz="1296" b="0" i="0">
+              <a:rPr sz="1200" b="0" i="0">
                 <a:solidFill>
                   <a:srgbClr val="E7F0F3"/>
                 </a:solidFill>
                 <a:latin typeface="Arial"/>
               </a:rPr>
-              <a:t>Material map</a:t>
-            </a:r>
-          </a:p>
-        </p:txBody>
-      </p:sp>
-      <p:sp>
-        <p:nvSpPr>
-          <p:cNvPr id="17" name="text 15" descr="sci-ppt:obj-015"/>
-          <p:cNvSpPr txBox="1"/>
-          <p:nvPr/>
-        </p:nvSpPr>
-        <p:spPr>
-          <a:xfrm>
-            <a:off x="1005840" y="2578608"/>
-            <a:ext cx="2286000" cy="310896"/>
-          </a:xfrm>
-          <a:prstGeom prst="rect">
-            <a:avLst/>
-          </a:prstGeom>
-          <a:noFill/>
-          <a:effectLst/>
-        </p:spPr>
-        <p:txBody>
-          <a:bodyPr wrap="none" lIns="0" rIns="0" tIns="0" bIns="0" anchor="ctr">
-            <a:spAutoFit/>
-          </a:bodyPr>
-          <a:lstStyle/>
+              <a:t>Inward motion (Ṙ &lt; 0) turns the viscous term into</a:t>
+            </a:r>
+          </a:p>
           <a:p>
             <a:pPr algn="l">
               <a:spcAft>
@@ -3609,27 +4621,59 @@
               </a:spcAft>
             </a:pPr>
             <a:r>
-              <a:rPr sz="1296" b="0" i="0">
+              <a:rPr sz="1200" b="0" i="0">
                 <a:solidFill>
                   <a:srgbClr val="E7F0F3"/>
                 </a:solidFill>
                 <a:latin typeface="Arial"/>
               </a:rPr>
-              <a:t>Reference</a:t>
-            </a:r>
-          </a:p>
-        </p:txBody>
-      </p:sp>
-      <p:sp>
-        <p:nvSpPr>
-          <p:cNvPr id="18" name="text 16" descr="sci-ppt:obj-016"/>
+              <a:t>a push.</a:t>
+            </a:r>
+          </a:p>
+        </p:txBody>
+      </p:sp>
+      <p:sp>
+        <p:nvSpPr>
+          <p:cNvPr id="47" name="A-E11 ellipse 45" descr="sci-ppt:o045"/>
+          <p:cNvSpPr/>
+          <p:nvPr/>
+        </p:nvSpPr>
+        <p:spPr>
+          <a:xfrm>
+            <a:off x="7484364" y="3080004"/>
+            <a:ext cx="82296" cy="82296"/>
+          </a:xfrm>
+          <a:prstGeom prst="ellipse">
+            <a:avLst/>
+          </a:prstGeom>
+          <a:solidFill>
+            <a:srgbClr val="8EDBD4"/>
+          </a:solidFill>
+          <a:ln w="12700">
+            <a:solidFill>
+              <a:srgbClr val="8EDBD4"/>
+            </a:solidFill>
+          </a:ln>
+          <a:effectLst/>
+        </p:spPr>
+        <p:txBody>
+          <a:bodyPr rtlCol="0" anchor="ctr"/>
+          <a:lstStyle/>
+          <a:p>
+            <a:pPr algn="ctr"/>
+          </a:p>
+        </p:txBody>
+      </p:sp>
+      <p:sp>
+        <p:nvSpPr>
+          <p:cNvPr id="48" name="A-E11 text 46" descr="sci-ppt:o046"/>
           <p:cNvSpPr txBox="1"/>
           <p:nvPr/>
         </p:nvSpPr>
         <p:spPr>
           <a:xfrm>
-            <a:off x="4846320" y="2660904"/>
-            <a:ext cx="3383280" cy="310896"/>
+            <a:off x="548640" y="5074920"/>
+            <a:ext cx="11247120" cy="231648"/>
           </a:xfrm>
           <a:prstGeom prst="rect">
             <a:avLst/>
@@ -3638,7 +4682,7 @@
           <a:effectLst/>
         </p:spPr>
         <p:txBody>
-          <a:bodyPr wrap="none" lIns="0" rIns="0" tIns="0" bIns="0" anchor="ctr">
+          <a:bodyPr wrap="none" lIns="18288" rIns="18288" tIns="18288" bIns="18288" anchor="t">
             <a:spAutoFit/>
           </a:bodyPr>
           <a:lstStyle/>
@@ -3649,27 +4693,67 @@
               </a:spcAft>
             </a:pPr>
             <a:r>
-              <a:rPr sz="1296" b="0" i="0">
+              <a:rPr sz="1200" b="0" i="0">
+                <a:solidFill>
+                  <a:srgbClr val="B4C7D2"/>
+                </a:solidFill>
+                <a:latin typeface="Arial"/>
+              </a:rPr>
+              <a:t>Illustration: p_b − p_∞ = 100 kPa, R = 30 µm, Ṙ = −10 m/s, σ = 0.072 N/m (assumed), η_g = 0.010 Pa s, G_g = 20 kPa, R_ref = 5 µm.</a:t>
+            </a:r>
+          </a:p>
+        </p:txBody>
+      </p:sp>
+      <p:sp>
+        <p:nvSpPr>
+          <p:cNvPr id="49" name="A-E11 text 47" descr="sci-ppt:o047"/>
+          <p:cNvSpPr txBox="1"/>
+          <p:nvPr/>
+        </p:nvSpPr>
+        <p:spPr>
+          <a:xfrm>
+            <a:off x="548640" y="5577840"/>
+            <a:ext cx="11247120" cy="239395"/>
+          </a:xfrm>
+          <a:prstGeom prst="rect">
+            <a:avLst/>
+          </a:prstGeom>
+          <a:noFill/>
+          <a:effectLst/>
+        </p:spPr>
+        <p:txBody>
+          <a:bodyPr wrap="none" lIns="18288" rIns="18288" tIns="18288" bIns="18288" anchor="t">
+            <a:spAutoFit/>
+          </a:bodyPr>
+          <a:lstStyle/>
+          <a:p>
+            <a:pPr algn="l">
+              <a:spcAft>
+                <a:spcPts val="0"/>
+              </a:spcAft>
+            </a:pPr>
+            <a:r>
+              <a:rPr sz="1250" b="0" i="0">
                 <a:solidFill>
                   <a:srgbClr val="E7F0F3"/>
                 </a:solidFill>
                 <a:latin typeface="Arial"/>
               </a:rPr>
-              <a:t>Deformed: λr , λθ</a:t>
-            </a:r>
-          </a:p>
-        </p:txBody>
-      </p:sp>
-      <p:sp>
-        <p:nvSpPr>
-          <p:cNvPr id="19" name="text 17" descr="sci-ppt:obj-017"/>
+              <a:t>The model quantifies cavity work before any directional-flow calculation; it does not create an outlet.</a:t>
+            </a:r>
+          </a:p>
+        </p:txBody>
+      </p:sp>
+      <p:sp>
+        <p:nvSpPr>
+          <p:cNvPr id="50" name="A-E11 text 48" descr="sci-ppt:o048"/>
           <p:cNvSpPr txBox="1"/>
           <p:nvPr/>
         </p:nvSpPr>
         <p:spPr>
           <a:xfrm>
-            <a:off x="6839712" y="777240"/>
-            <a:ext cx="1645920" cy="310896"/>
+            <a:off x="320040" y="6510528"/>
+            <a:ext cx="11521440" cy="200660"/>
           </a:xfrm>
           <a:prstGeom prst="rect">
             <a:avLst/>
@@ -3678,7 +4762,7 @@
           <a:effectLst/>
         </p:spPr>
         <p:txBody>
-          <a:bodyPr wrap="none" lIns="0" rIns="0" tIns="0" bIns="0" anchor="ctr">
+          <a:bodyPr wrap="none" lIns="18288" rIns="18288" tIns="18288" bIns="18288" anchor="t">
             <a:spAutoFit/>
           </a:bodyPr>
           <a:lstStyle/>
@@ -3689,533 +4773,13 @@
               </a:spcAft>
             </a:pPr>
             <a:r>
-              <a:rPr sz="1296" b="0" i="0">
+              <a:rPr sz="1000" b="0" i="0">
                 <a:solidFill>
-                  <a:srgbClr val="E7F0F3"/>
+                  <a:srgbClr val="B4C7D2"/>
                 </a:solidFill>
                 <a:latin typeface="Arial"/>
               </a:rPr>
-              <a:t>Gg , ηg</a:t>
-            </a:r>
-          </a:p>
-        </p:txBody>
-      </p:sp>
-      <p:sp>
-        <p:nvSpPr>
-          <p:cNvPr id="20" name="text 18" descr="sci-ppt:obj-018"/>
-          <p:cNvSpPr txBox="1"/>
-          <p:nvPr/>
-        </p:nvSpPr>
-        <p:spPr>
-          <a:xfrm>
-            <a:off x="6839712" y="1207008"/>
-            <a:ext cx="1828800" cy="310896"/>
-          </a:xfrm>
-          <a:prstGeom prst="rect">
-            <a:avLst/>
-          </a:prstGeom>
-          <a:noFill/>
-          <a:effectLst/>
-        </p:spPr>
-        <p:txBody>
-          <a:bodyPr wrap="none" lIns="0" rIns="0" tIns="0" bIns="0" anchor="ctr">
-            <a:spAutoFit/>
-          </a:bodyPr>
-          <a:lstStyle/>
-          <a:p>
-            <a:pPr algn="l">
-              <a:spcAft>
-                <a:spcPts val="0"/>
-              </a:spcAft>
-            </a:pPr>
-            <a:r>
-              <a:rPr sz="1296" b="0" i="0">
-                <a:solidFill>
-                  <a:srgbClr val="E7F0F3"/>
-                </a:solidFill>
-                <a:latin typeface="Arial"/>
-              </a:rPr>
-              <a:t>σrr , σθθ</a:t>
-            </a:r>
-          </a:p>
-        </p:txBody>
-      </p:sp>
-      <p:sp>
-        <p:nvSpPr>
-          <p:cNvPr id="21" name="text 19" descr="sci-ppt:obj-019"/>
-          <p:cNvSpPr txBox="1"/>
-          <p:nvPr/>
-        </p:nvSpPr>
-        <p:spPr>
-          <a:xfrm>
-            <a:off x="6839712" y="1645920"/>
-            <a:ext cx="1371600" cy="310896"/>
-          </a:xfrm>
-          <a:prstGeom prst="rect">
-            <a:avLst/>
-          </a:prstGeom>
-          <a:noFill/>
-          <a:effectLst/>
-        </p:spPr>
-        <p:txBody>
-          <a:bodyPr wrap="none" lIns="0" rIns="0" tIns="0" bIns="0" anchor="ctr">
-            <a:spAutoFit/>
-          </a:bodyPr>
-          <a:lstStyle/>
-          <a:p>
-            <a:pPr algn="l">
-              <a:spcAft>
-                <a:spcPts val="0"/>
-              </a:spcAft>
-            </a:pPr>
-            <a:r>
-              <a:rPr sz="1296" b="0" i="0">
-                <a:solidFill>
-                  <a:srgbClr val="E7F0F3"/>
-                </a:solidFill>
-                <a:latin typeface="Arial"/>
-              </a:rPr>
-              <a:t>p∞</a:t>
-            </a:r>
-          </a:p>
-        </p:txBody>
-      </p:sp>
-      <p:sp>
-        <p:nvSpPr>
-          <p:cNvPr id="22" name="text 20" descr="sci-ppt:obj-020"/>
-          <p:cNvSpPr txBox="1"/>
-          <p:nvPr/>
-        </p:nvSpPr>
-        <p:spPr>
-          <a:xfrm>
-            <a:off x="5266944" y="1682496"/>
-            <a:ext cx="822960" cy="310896"/>
-          </a:xfrm>
-          <a:prstGeom prst="rect">
-            <a:avLst/>
-          </a:prstGeom>
-          <a:noFill/>
-          <a:effectLst/>
-        </p:spPr>
-        <p:txBody>
-          <a:bodyPr wrap="none" lIns="0" rIns="0" tIns="0" bIns="0" anchor="ctr">
-            <a:spAutoFit/>
-          </a:bodyPr>
-          <a:lstStyle/>
-          <a:p>
-            <a:pPr algn="l">
-              <a:spcAft>
-                <a:spcPts val="0"/>
-              </a:spcAft>
-            </a:pPr>
-            <a:r>
-              <a:rPr sz="1296" b="0" i="0">
-                <a:solidFill>
-                  <a:srgbClr val="E7F0F3"/>
-                </a:solidFill>
-                <a:latin typeface="Arial"/>
-              </a:rPr>
-              <a:t>pb</a:t>
-            </a:r>
-          </a:p>
-        </p:txBody>
-      </p:sp>
-      <p:sp>
-        <p:nvSpPr>
-          <p:cNvPr id="23" name="text 21" descr="sci-ppt:obj-021"/>
-          <p:cNvSpPr txBox="1"/>
-          <p:nvPr/>
-        </p:nvSpPr>
-        <p:spPr>
-          <a:xfrm>
-            <a:off x="868680" y="2990088"/>
-            <a:ext cx="7772400" cy="310896"/>
-          </a:xfrm>
-          <a:prstGeom prst="rect">
-            <a:avLst/>
-          </a:prstGeom>
-          <a:noFill/>
-          <a:effectLst/>
-        </p:spPr>
-        <p:txBody>
-          <a:bodyPr wrap="none" lIns="0" rIns="0" tIns="0" bIns="0" anchor="ctr">
-            <a:spAutoFit/>
-          </a:bodyPr>
-          <a:lstStyle/>
-          <a:p>
-            <a:pPr algn="l">
-              <a:spcAft>
-                <a:spcPts val="0"/>
-              </a:spcAft>
-            </a:pPr>
-            <a:r>
-              <a:rPr sz="1152" b="0" i="0">
-                <a:solidFill>
-                  <a:srgbClr val="E7F0F3"/>
-                </a:solidFill>
-                <a:latin typeface="Arial"/>
-              </a:rPr>
-              <a:t>r₀³ − Rref³ = r³ − R³ ; radial coordinates point outward</a:t>
-            </a:r>
-          </a:p>
-        </p:txBody>
-      </p:sp>
-      <p:sp>
-        <p:nvSpPr>
-          <p:cNvPr id="24" name="text 22" descr="sci-ppt:obj-022"/>
-          <p:cNvSpPr txBox="1"/>
-          <p:nvPr/>
-        </p:nvSpPr>
-        <p:spPr>
-          <a:xfrm>
-            <a:off x="256032" y="3465576"/>
-            <a:ext cx="7315200" cy="310896"/>
-          </a:xfrm>
-          <a:prstGeom prst="rect">
-            <a:avLst/>
-          </a:prstGeom>
-          <a:noFill/>
-          <a:effectLst/>
-        </p:spPr>
-        <p:txBody>
-          <a:bodyPr wrap="none" lIns="0" rIns="0" tIns="0" bIns="0" anchor="ctr">
-            <a:spAutoFit/>
-          </a:bodyPr>
-          <a:lstStyle/>
-          <a:p>
-            <a:pPr algn="l">
-              <a:spcAft>
-                <a:spcPts val="0"/>
-              </a:spcAft>
-            </a:pPr>
-            <a:r>
-              <a:rPr sz="1296" b="0" i="0">
-                <a:solidFill>
-                  <a:srgbClr val="8EDBD4"/>
-                </a:solidFill>
-                <a:latin typeface="Arial"/>
-              </a:rPr>
-              <a:t>Variables and physical limits</a:t>
-            </a:r>
-          </a:p>
-        </p:txBody>
-      </p:sp>
-      <p:sp>
-        <p:nvSpPr>
-          <p:cNvPr id="25" name="text 23" descr="sci-ppt:obj-023"/>
-          <p:cNvSpPr txBox="1"/>
-          <p:nvPr/>
-        </p:nvSpPr>
-        <p:spPr>
-          <a:xfrm>
-            <a:off x="365760" y="3813048"/>
-            <a:ext cx="8412480" cy="310896"/>
-          </a:xfrm>
-          <a:prstGeom prst="rect">
-            <a:avLst/>
-          </a:prstGeom>
-          <a:noFill/>
-          <a:effectLst/>
-        </p:spPr>
-        <p:txBody>
-          <a:bodyPr wrap="none" lIns="0" rIns="0" tIns="0" bIns="0" anchor="ctr">
-            <a:spAutoFit/>
-          </a:bodyPr>
-          <a:lstStyle/>
-          <a:p>
-            <a:pPr algn="l">
-              <a:spcAft>
-                <a:spcPts val="0"/>
-              </a:spcAft>
-            </a:pPr>
-            <a:r>
-              <a:rPr sz="1152" b="0" i="0">
-                <a:solidFill>
-                  <a:srgbClr val="E7F0F3"/>
-                </a:solidFill>
-                <a:latin typeface="Arial"/>
-              </a:rPr>
-              <a:t>• pb: inner driving pressure</a:t>
-            </a:r>
-          </a:p>
-        </p:txBody>
-      </p:sp>
-      <p:sp>
-        <p:nvSpPr>
-          <p:cNvPr id="26" name="text 24" descr="sci-ppt:obj-024"/>
-          <p:cNvSpPr txBox="1"/>
-          <p:nvPr/>
-        </p:nvSpPr>
-        <p:spPr>
-          <a:xfrm>
-            <a:off x="365760" y="4023360"/>
-            <a:ext cx="8412480" cy="310896"/>
-          </a:xfrm>
-          <a:prstGeom prst="rect">
-            <a:avLst/>
-          </a:prstGeom>
-          <a:noFill/>
-          <a:effectLst/>
-        </p:spPr>
-        <p:txBody>
-          <a:bodyPr wrap="none" lIns="0" rIns="0" tIns="0" bIns="0" anchor="ctr">
-            <a:spAutoFit/>
-          </a:bodyPr>
-          <a:lstStyle/>
-          <a:p>
-            <a:pPr algn="l">
-              <a:spcAft>
-                <a:spcPts val="0"/>
-              </a:spcAft>
-            </a:pPr>
-            <a:r>
-              <a:rPr sz="1152" b="0" i="0">
-                <a:solidFill>
-                  <a:srgbClr val="E7F0F3"/>
-                </a:solidFill>
-                <a:latin typeface="Arial"/>
-              </a:rPr>
-              <a:t>• p∞: exterior pressure</a:t>
-            </a:r>
-          </a:p>
-        </p:txBody>
-      </p:sp>
-      <p:sp>
-        <p:nvSpPr>
-          <p:cNvPr id="27" name="text 25" descr="sci-ppt:obj-025"/>
-          <p:cNvSpPr txBox="1"/>
-          <p:nvPr/>
-        </p:nvSpPr>
-        <p:spPr>
-          <a:xfrm>
-            <a:off x="365760" y="4233672"/>
-            <a:ext cx="8412480" cy="310896"/>
-          </a:xfrm>
-          <a:prstGeom prst="rect">
-            <a:avLst/>
-          </a:prstGeom>
-          <a:noFill/>
-          <a:effectLst/>
-        </p:spPr>
-        <p:txBody>
-          <a:bodyPr wrap="none" lIns="0" rIns="0" tIns="0" bIns="0" anchor="ctr">
-            <a:spAutoFit/>
-          </a:bodyPr>
-          <a:lstStyle/>
-          <a:p>
-            <a:pPr algn="l">
-              <a:spcAft>
-                <a:spcPts val="0"/>
-              </a:spcAft>
-            </a:pPr>
-            <a:r>
-              <a:rPr sz="1152" b="0" i="0">
-                <a:solidFill>
-                  <a:srgbClr val="E7F0F3"/>
-                </a:solidFill>
-                <a:latin typeface="Arial"/>
-              </a:rPr>
-              <a:t>• 2σ/R: capillary resistance</a:t>
-            </a:r>
-          </a:p>
-        </p:txBody>
-      </p:sp>
-      <p:sp>
-        <p:nvSpPr>
-          <p:cNvPr id="28" name="text 26" descr="sci-ppt:obj-026"/>
-          <p:cNvSpPr txBox="1"/>
-          <p:nvPr/>
-        </p:nvSpPr>
-        <p:spPr>
-          <a:xfrm>
-            <a:off x="365760" y="4443984"/>
-            <a:ext cx="8412480" cy="310896"/>
-          </a:xfrm>
-          <a:prstGeom prst="rect">
-            <a:avLst/>
-          </a:prstGeom>
-          <a:noFill/>
-          <a:effectLst/>
-        </p:spPr>
-        <p:txBody>
-          <a:bodyPr wrap="none" lIns="0" rIns="0" tIns="0" bIns="0" anchor="ctr">
-            <a:spAutoFit/>
-          </a:bodyPr>
-          <a:lstStyle/>
-          <a:p>
-            <a:pPr algn="l">
-              <a:spcAft>
-                <a:spcPts val="0"/>
-              </a:spcAft>
-            </a:pPr>
-            <a:r>
-              <a:rPr sz="1152" b="0" i="0">
-                <a:solidFill>
-                  <a:srgbClr val="E7F0F3"/>
-                </a:solidFill>
-                <a:latin typeface="Arial"/>
-              </a:rPr>
-              <a:t>• pel(R): network resistance</a:t>
-            </a:r>
-          </a:p>
-        </p:txBody>
-      </p:sp>
-      <p:sp>
-        <p:nvSpPr>
-          <p:cNvPr id="29" name="text 27" descr="sci-ppt:obj-027"/>
-          <p:cNvSpPr txBox="1"/>
-          <p:nvPr/>
-        </p:nvSpPr>
-        <p:spPr>
-          <a:xfrm>
-            <a:off x="365760" y="4654296"/>
-            <a:ext cx="8412480" cy="310896"/>
-          </a:xfrm>
-          <a:prstGeom prst="rect">
-            <a:avLst/>
-          </a:prstGeom>
-          <a:noFill/>
-          <a:effectLst/>
-        </p:spPr>
-        <p:txBody>
-          <a:bodyPr wrap="none" lIns="0" rIns="0" tIns="0" bIns="0" anchor="ctr">
-            <a:spAutoFit/>
-          </a:bodyPr>
-          <a:lstStyle/>
-          <a:p>
-            <a:pPr algn="l">
-              <a:spcAft>
-                <a:spcPts val="0"/>
-              </a:spcAft>
-            </a:pPr>
-            <a:r>
-              <a:rPr sz="1152" b="0" i="0">
-                <a:solidFill>
-                  <a:srgbClr val="E7F0F3"/>
-                </a:solidFill>
-                <a:latin typeface="Arial"/>
-              </a:rPr>
-              <a:t>• −4ηgṘ/R: viscous term</a:t>
-            </a:r>
-          </a:p>
-        </p:txBody>
-      </p:sp>
-      <p:sp>
-        <p:nvSpPr>
-          <p:cNvPr id="30" name="text 28" descr="sci-ppt:obj-028"/>
-          <p:cNvSpPr txBox="1"/>
-          <p:nvPr/>
-        </p:nvSpPr>
-        <p:spPr>
-          <a:xfrm>
-            <a:off x="365760" y="4864608"/>
-            <a:ext cx="8412480" cy="310896"/>
-          </a:xfrm>
-          <a:prstGeom prst="rect">
-            <a:avLst/>
-          </a:prstGeom>
-          <a:noFill/>
-          <a:effectLst/>
-        </p:spPr>
-        <p:txBody>
-          <a:bodyPr wrap="none" lIns="0" rIns="0" tIns="0" bIns="0" anchor="ctr">
-            <a:spAutoFit/>
-          </a:bodyPr>
-          <a:lstStyle/>
-          <a:p>
-            <a:pPr algn="l">
-              <a:spcAft>
-                <a:spcPts val="0"/>
-              </a:spcAft>
-            </a:pPr>
-            <a:r>
-              <a:rPr sz="1152" b="0" i="0">
-                <a:solidFill>
-                  <a:srgbClr val="E7F0F3"/>
-                </a:solidFill>
-                <a:latin typeface="Arial"/>
-              </a:rPr>
-              <a:t>• ρg, R, Ṙ, R̈</a:t>
-            </a:r>
-          </a:p>
-        </p:txBody>
-      </p:sp>
-      <p:sp>
-        <p:nvSpPr>
-          <p:cNvPr id="31" name="text 29" descr="sci-ppt:obj-029"/>
-          <p:cNvSpPr txBox="1"/>
-          <p:nvPr/>
-        </p:nvSpPr>
-        <p:spPr>
-          <a:xfrm>
-            <a:off x="365760" y="5074920"/>
-            <a:ext cx="8412480" cy="310896"/>
-          </a:xfrm>
-          <a:prstGeom prst="rect">
-            <a:avLst/>
-          </a:prstGeom>
-          <a:noFill/>
-          <a:effectLst/>
-        </p:spPr>
-        <p:txBody>
-          <a:bodyPr wrap="none" lIns="0" rIns="0" tIns="0" bIns="0" anchor="ctr">
-            <a:spAutoFit/>
-          </a:bodyPr>
-          <a:lstStyle/>
-          <a:p>
-            <a:pPr algn="l">
-              <a:spcAft>
-                <a:spcPts val="0"/>
-              </a:spcAft>
-            </a:pPr>
-            <a:r>
-              <a:rPr sz="1152" b="0" i="0">
-                <a:solidFill>
-                  <a:srgbClr val="E7F0F3"/>
-                </a:solidFill>
-                <a:latin typeface="Arial"/>
-              </a:rPr>
-              <a:t>Spherical motion has no directional jet</a:t>
-            </a:r>
-          </a:p>
-        </p:txBody>
-      </p:sp>
-      <p:sp>
-        <p:nvSpPr>
-          <p:cNvPr id="32" name="text 30" descr="sci-ppt:obj-030"/>
-          <p:cNvSpPr txBox="1"/>
-          <p:nvPr/>
-        </p:nvSpPr>
-        <p:spPr>
-          <a:xfrm>
-            <a:off x="365760" y="5285232"/>
-            <a:ext cx="8412480" cy="310896"/>
-          </a:xfrm>
-          <a:prstGeom prst="rect">
-            <a:avLst/>
-          </a:prstGeom>
-          <a:noFill/>
-          <a:effectLst/>
-        </p:spPr>
-        <p:txBody>
-          <a:bodyPr wrap="none" lIns="0" rIns="0" tIns="0" bIns="0" anchor="ctr">
-            <a:spAutoFit/>
-          </a:bodyPr>
-          <a:lstStyle/>
-          <a:p>
-            <a:pPr algn="l">
-              <a:spcAft>
-                <a:spcPts val="0"/>
-              </a:spcAft>
-            </a:pPr>
-            <a:r>
-              <a:rPr sz="1152" b="0" i="0">
-                <a:solidFill>
-                  <a:srgbClr val="E7F0F3"/>
-                </a:solidFill>
-                <a:latin typeface="Arial"/>
-              </a:rPr>
-              <a:t>A liquid pocket requires a separate layered problem</a:t>
+              <a:t>Radial control of Eq. A-E11 (values illustrative; the inertia bar is what is left over).</a:t>
             </a:r>
           </a:p>
         </p:txBody>
